--- a/output/final_slide.pptx
+++ b/output/final_slide.pptx
@@ -1220,7 +1220,7 @@
 </file>
 
 <file path=ppt/slides/slide4.xml><?xml version="1.0" encoding="UTF-8" standalone="yes"?>
-<p:sld xmlns:a="http://schemas.openxmlformats.org/drawingml/2006/main" xmlns:r="http://schemas.openxmlformats.org/officeDocument/2006/relationships" xmlns:p="http://schemas.openxmlformats.org/presentationml/2006/main"><p:cSld name="Slide 4"><p:spTree><p:nvGrpSpPr><p:cNvPr id="1" name=""/><p:cNvGrpSpPr/><p:nvPr/></p:nvGrpSpPr><p:grpSpPr><a:xfrm><a:off x="0" y="0"/><a:ext cx="0" cy="0"/><a:chOff x="0" y="0"/><a:chExt cx="0" cy="0"/></a:xfrm></p:grpSpPr><p:sp><p:nvSpPr><p:cNvPr id="2" name="Shape 0"></p:cNvPr><p:cNvSpPr/><p:nvPr></p:nvPr></p:nvSpPr><p:spPr><a:xfrm><a:off x="0" y="0"/><a:ext cx="12191695" cy="6858000"/></a:xfrm><a:prstGeom prst="rect"><a:avLst></a:avLst></a:prstGeom><a:solidFill><a:srgbClr val="F4F0EA"/></a:solidFill><a:ln w="12700"><a:solidFill><a:srgbClr val="F4F0EA"/></a:solidFill><a:prstDash val="solid"/></a:ln></p:spPr></p:sp><p:sp><p:nvSpPr><p:cNvPr id="3" name="Shape 1"></p:cNvPr><p:cNvSpPr/><p:nvPr></p:nvPr></p:nvSpPr><p:spPr><a:xfrm><a:off x="960120" y="0"/><a:ext cx="9144" cy="6858000"/></a:xfrm><a:prstGeom prst="rect"><a:avLst></a:avLst></a:prstGeom><a:solidFill><a:srgbClr val="DDD8CF"/></a:solidFill><a:ln w="12700"><a:solidFill><a:srgbClr val="DDD8CF"/></a:solidFill><a:prstDash val="solid"/></a:ln></p:spPr></p:sp><p:sp><p:nvSpPr><p:cNvPr id="4" name="Shape 2"></p:cNvPr><p:cNvSpPr/><p:nvPr></p:nvPr></p:nvSpPr><p:spPr><a:xfrm><a:off x="1920240" y="0"/><a:ext cx="9144" cy="6858000"/></a:xfrm><a:prstGeom prst="rect"><a:avLst></a:avLst></a:prstGeom><a:solidFill><a:srgbClr val="DDD8CF"/></a:solidFill><a:ln w="12700"><a:solidFill><a:srgbClr val="DDD8CF"/></a:solidFill><a:prstDash val="solid"/></a:ln></p:spPr></p:sp><p:sp><p:nvSpPr><p:cNvPr id="5" name="Shape 3"></p:cNvPr><p:cNvSpPr/><p:nvPr></p:nvPr></p:nvSpPr><p:spPr><a:xfrm><a:off x="2880360" y="0"/><a:ext cx="9144" cy="6858000"/></a:xfrm><a:prstGeom prst="rect"><a:avLst></a:avLst></a:prstGeom><a:solidFill><a:srgbClr val="DDD8CF"/></a:solidFill><a:ln w="12700"><a:solidFill><a:srgbClr val="DDD8CF"/></a:solidFill><a:prstDash val="solid"/></a:ln></p:spPr></p:sp><p:sp><p:nvSpPr><p:cNvPr id="6" name="Shape 4"></p:cNvPr><p:cNvSpPr/><p:nvPr></p:nvPr></p:nvSpPr><p:spPr><a:xfrm><a:off x="3840480" y="0"/><a:ext cx="9144" cy="6858000"/></a:xfrm><a:prstGeom prst="rect"><a:avLst></a:avLst></a:prstGeom><a:solidFill><a:srgbClr val="DDD8CF"/></a:solidFill><a:ln w="12700"><a:solidFill><a:srgbClr val="DDD8CF"/></a:solidFill><a:prstDash val="solid"/></a:ln></p:spPr></p:sp><p:sp><p:nvSpPr><p:cNvPr id="7" name="Shape 5"></p:cNvPr><p:cNvSpPr/><p:nvPr></p:nvPr></p:nvSpPr><p:spPr><a:xfrm><a:off x="4800600" y="0"/><a:ext cx="9144" cy="6858000"/></a:xfrm><a:prstGeom prst="rect"><a:avLst></a:avLst></a:prstGeom><a:solidFill><a:srgbClr val="DDD8CF"/></a:solidFill><a:ln w="12700"><a:solidFill><a:srgbClr val="DDD8CF"/></a:solidFill><a:prstDash val="solid"/></a:ln></p:spPr></p:sp><p:sp><p:nvSpPr><p:cNvPr id="8" name="Shape 6"></p:cNvPr><p:cNvSpPr/><p:nvPr></p:nvPr></p:nvSpPr><p:spPr><a:xfrm><a:off x="5760720" y="0"/><a:ext cx="9144" cy="6858000"/></a:xfrm><a:prstGeom prst="rect"><a:avLst></a:avLst></a:prstGeom><a:solidFill><a:srgbClr val="DDD8CF"/></a:solidFill><a:ln w="12700"><a:solidFill><a:srgbClr val="DDD8CF"/></a:solidFill><a:prstDash val="solid"/></a:ln></p:spPr></p:sp><p:sp><p:nvSpPr><p:cNvPr id="9" name="Shape 7"></p:cNvPr><p:cNvSpPr/><p:nvPr></p:nvPr></p:nvSpPr><p:spPr><a:xfrm><a:off x="6720840" y="0"/><a:ext cx="9144" cy="6858000"/></a:xfrm><a:prstGeom prst="rect"><a:avLst></a:avLst></a:prstGeom><a:solidFill><a:srgbClr val="DDD8CF"/></a:solidFill><a:ln w="12700"><a:solidFill><a:srgbClr val="DDD8CF"/></a:solidFill><a:prstDash val="solid"/></a:ln></p:spPr></p:sp><p:sp><p:nvSpPr><p:cNvPr id="10" name="Shape 8"></p:cNvPr><p:cNvSpPr/><p:nvPr></p:nvPr></p:nvSpPr><p:spPr><a:xfrm><a:off x="7680960" y="0"/><a:ext cx="9144" cy="6858000"/></a:xfrm><a:prstGeom prst="rect"><a:avLst></a:avLst></a:prstGeom><a:solidFill><a:srgbClr val="DDD8CF"/></a:solidFill><a:ln w="12700"><a:solidFill><a:srgbClr val="DDD8CF"/></a:solidFill><a:prstDash val="solid"/></a:ln></p:spPr></p:sp><p:sp><p:nvSpPr><p:cNvPr id="11" name="Shape 9"></p:cNvPr><p:cNvSpPr/><p:nvPr></p:nvPr></p:nvSpPr><p:spPr><a:xfrm><a:off x="8641080" y="0"/><a:ext cx="9144" cy="6858000"/></a:xfrm><a:prstGeom prst="rect"><a:avLst></a:avLst></a:prstGeom><a:solidFill><a:srgbClr val="DDD8CF"/></a:solidFill><a:ln w="12700"><a:solidFill><a:srgbClr val="DDD8CF"/></a:solidFill><a:prstDash val="solid"/></a:ln></p:spPr></p:sp><p:sp><p:nvSpPr><p:cNvPr id="12" name="Shape 10"></p:cNvPr><p:cNvSpPr/><p:nvPr></p:nvPr></p:nvSpPr><p:spPr><a:xfrm><a:off x="9601200" y="0"/><a:ext cx="9144" cy="6858000"/></a:xfrm><a:prstGeom prst="rect"><a:avLst></a:avLst></a:prstGeom><a:solidFill><a:srgbClr val="DDD8CF"/></a:solidFill><a:ln w="12700"><a:solidFill><a:srgbClr val="DDD8CF"/></a:solidFill><a:prstDash val="solid"/></a:ln></p:spPr></p:sp><p:sp><p:nvSpPr><p:cNvPr id="13" name="Shape 11"></p:cNvPr><p:cNvSpPr/><p:nvPr></p:nvPr></p:nvSpPr><p:spPr><a:xfrm><a:off x="10561320" y="0"/><a:ext cx="9144" cy="6858000"/></a:xfrm><a:prstGeom prst="rect"><a:avLst></a:avLst></a:prstGeom><a:solidFill><a:srgbClr val="DDD8CF"/></a:solidFill><a:ln w="12700"><a:solidFill><a:srgbClr val="DDD8CF"/></a:solidFill><a:prstDash val="solid"/></a:ln></p:spPr></p:sp><p:sp><p:nvSpPr><p:cNvPr id="14" name="Shape 12"></p:cNvPr><p:cNvSpPr/><p:nvPr></p:nvPr></p:nvSpPr><p:spPr><a:xfrm><a:off x="0" y="960120"/><a:ext cx="12191695" cy="9144"/></a:xfrm><a:prstGeom prst="rect"><a:avLst></a:avLst></a:prstGeom><a:solidFill><a:srgbClr val="DDD8CF"/></a:solidFill><a:ln w="12700"><a:solidFill><a:srgbClr val="DDD8CF"/></a:solidFill><a:prstDash val="solid"/></a:ln></p:spPr></p:sp><p:sp><p:nvSpPr><p:cNvPr id="15" name="Shape 13"></p:cNvPr><p:cNvSpPr/><p:nvPr></p:nvPr></p:nvSpPr><p:spPr><a:xfrm><a:off x="0" y="1920240"/><a:ext cx="12191695" cy="9144"/></a:xfrm><a:prstGeom prst="rect"><a:avLst></a:avLst></a:prstGeom><a:solidFill><a:srgbClr val="DDD8CF"/></a:solidFill><a:ln w="12700"><a:solidFill><a:srgbClr val="DDD8CF"/></a:solidFill><a:prstDash val="solid"/></a:ln></p:spPr></p:sp><p:sp><p:nvSpPr><p:cNvPr id="16" name="Shape 14"></p:cNvPr><p:cNvSpPr/><p:nvPr></p:nvPr></p:nvSpPr><p:spPr><a:xfrm><a:off x="0" y="2880360"/><a:ext cx="12191695" cy="9144"/></a:xfrm><a:prstGeom prst="rect"><a:avLst></a:avLst></a:prstGeom><a:solidFill><a:srgbClr val="DDD8CF"/></a:solidFill><a:ln w="12700"><a:solidFill><a:srgbClr val="DDD8CF"/></a:solidFill><a:prstDash val="solid"/></a:ln></p:spPr></p:sp><p:sp><p:nvSpPr><p:cNvPr id="17" name="Shape 15"></p:cNvPr><p:cNvSpPr/><p:nvPr></p:nvPr></p:nvSpPr><p:spPr><a:xfrm><a:off x="0" y="3840480"/><a:ext cx="12191695" cy="9144"/></a:xfrm><a:prstGeom prst="rect"><a:avLst></a:avLst></a:prstGeom><a:solidFill><a:srgbClr val="DDD8CF"/></a:solidFill><a:ln w="12700"><a:solidFill><a:srgbClr val="DDD8CF"/></a:solidFill><a:prstDash val="solid"/></a:ln></p:spPr></p:sp><p:sp><p:nvSpPr><p:cNvPr id="18" name="Shape 16"></p:cNvPr><p:cNvSpPr/><p:nvPr></p:nvPr></p:nvSpPr><p:spPr><a:xfrm><a:off x="0" y="4800600"/><a:ext cx="12191695" cy="9144"/></a:xfrm><a:prstGeom prst="rect"><a:avLst></a:avLst></a:prstGeom><a:solidFill><a:srgbClr val="DDD8CF"/></a:solidFill><a:ln w="12700"><a:solidFill><a:srgbClr val="DDD8CF"/></a:solidFill><a:prstDash val="solid"/></a:ln></p:spPr></p:sp><p:sp><p:nvSpPr><p:cNvPr id="19" name="Shape 17"></p:cNvPr><p:cNvSpPr/><p:nvPr></p:nvPr></p:nvSpPr><p:spPr><a:xfrm><a:off x="0" y="5760720"/><a:ext cx="12191695" cy="9144"/></a:xfrm><a:prstGeom prst="rect"><a:avLst></a:avLst></a:prstGeom><a:solidFill><a:srgbClr val="DDD8CF"/></a:solidFill><a:ln w="12700"><a:solidFill><a:srgbClr val="DDD8CF"/></a:solidFill><a:prstDash val="solid"/></a:ln></p:spPr></p:sp><p:sp><p:nvSpPr><p:cNvPr id="20" name="Shape 18"></p:cNvPr><p:cNvSpPr/><p:nvPr></p:nvPr></p:nvSpPr><p:spPr><a:xfrm><a:off x="411480" y="320040"/><a:ext cx="2377440" cy="292608"/></a:xfrm><a:prstGeom prst="roundRect"><a:avLst><a:gd name="adj" fmla="val 50000"/></a:avLst></a:prstGeom><a:solidFill><a:srgbClr val="111827"/></a:solidFill><a:ln w="12700"><a:solidFill><a:srgbClr val="111827"/></a:solidFill><a:prstDash val="solid"/></a:ln></p:spPr></p:sp><p:sp><p:nvSpPr><p:cNvPr id="21" name="Text 19"></p:cNvPr><p:cNvSpPr/><p:nvPr></p:nvPr></p:nvSpPr><p:spPr><a:xfrm><a:off x="502920" y="320040"/><a:ext cx="2194560" cy="292608"/></a:xfrm><a:prstGeom prst="rect"><a:avLst></a:avLst></a:prstGeom><a:noFill/><a:ln></a:ln></p:spPr><p:txBody><a:bodyPr wrap="square" rtlCol="0" anchor="ctr"></a:bodyPr><a:lstStyle/><a:p><a:pPr indent="0" marL="0"><a:buNone/></a:pPr><a:r><a:rPr lang="en-US" sz="900" b="1" spc="200" kern="0" dirty="0"><a:solidFill><a:srgbClr val="FFD147"/></a:solidFill><a:latin typeface=""JetBrains Mono", "Courier New", monospace" pitchFamily="34" charset="0"/><a:ea typeface=""JetBrains Mono", "Courier New", monospace" pitchFamily="34" charset="-122"/><a:cs typeface=""JetBrains Mono", "Courier New", monospace" pitchFamily="34" charset="-120"/></a:rPr><a:t>PART 03</a:t></a:r><a:endParaRPr lang="en-US" sz="900" dirty="0"/></a:p></p:txBody></p:sp><p:sp><p:nvSpPr><p:cNvPr id="22" name="Text 20"></p:cNvPr><p:cNvSpPr/><p:nvPr></p:nvPr></p:nvSpPr><p:spPr><a:xfrm><a:off x="411480" y="777240"/><a:ext cx="10972800" cy="731520"/></a:xfrm><a:prstGeom prst="rect"><a:avLst></a:avLst></a:prstGeom><a:noFill/><a:ln></a:ln></p:spPr><p:txBody><a:bodyPr wrap="square" rtlCol="0" anchor="ctr"></a:bodyPr><a:lstStyle/><a:p><a:pPr indent="0" marL="0"><a:buNone/></a:pPr><a:r><a:rPr lang="en-US" sz="4200" b="1" spc="-300" kern="0" dirty="0"><a:solidFill><a:srgbClr val="111827"/></a:solidFill><a:latin typeface="Arial Black, "Trebuchet MS", "Helvetica Neue", sans-serif" pitchFamily="34" charset="0"/><a:ea typeface="Arial Black, "Trebuchet MS", "Helvetica Neue", sans-serif" pitchFamily="34" charset="-122"/><a:cs typeface="Arial Black, "Trebuchet MS", "Helvetica Neue", sans-serif" pitchFamily="34" charset="-120"/></a:rPr><a:t>The SparseLU Paradox:</a:t></a:r><a:endParaRPr lang="en-US" sz="4200" dirty="0"/></a:p></p:txBody></p:sp><p:sp><p:nvSpPr><p:cNvPr id="23" name="Shape 21"></p:cNvPr><p:cNvSpPr/><p:nvPr></p:nvPr></p:nvSpPr><p:spPr><a:xfrm><a:off x="5943600" y="1417320"/><a:ext cx="5852160" cy="640080"/></a:xfrm><a:prstGeom prst="roundRect"><a:avLst><a:gd name="adj" fmla="val 11429"/></a:avLst></a:prstGeom><a:solidFill><a:srgbClr val="FFD147"/></a:solidFill><a:ln w="31750"><a:solidFill><a:srgbClr val="111827"/></a:solidFill><a:prstDash val="solid"/></a:ln></p:spPr></p:sp><p:sp><p:nvSpPr><p:cNvPr id="24" name="Text 22"></p:cNvPr><p:cNvSpPr/><p:nvPr></p:nvPr></p:nvSpPr><p:spPr><a:xfrm><a:off x="6035040" y="1463040"/><a:ext cx="5669280" cy="548640"/></a:xfrm><a:prstGeom prst="rect"><a:avLst></a:avLst></a:prstGeom><a:noFill/><a:ln></a:ln></p:spPr><p:txBody><a:bodyPr wrap="square" rtlCol="0" anchor="ctr"></a:bodyPr><a:lstStyle/><a:p><a:pPr indent="0" marL="0"><a:buNone/></a:pPr><a:r><a:rPr lang="en-US" sz="3000" b="1" spc="-200" kern="0" dirty="0"><a:solidFill><a:srgbClr val="111827"/></a:solidFill><a:latin typeface="Arial Black, "Trebuchet MS", "Helvetica Neue", sans-serif" pitchFamily="34" charset="0"/><a:ea typeface="Arial Black, "Trebuchet MS", "Helvetica Neue", sans-serif" pitchFamily="34" charset="-122"/><a:cs typeface="Arial Black, "Trebuchet MS", "Helvetica Neue", sans-serif" pitchFamily="34" charset="-120"/></a:rPr><a:t>When Locality Slows Down</a:t></a:r><a:endParaRPr lang="en-US" sz="3000" dirty="0"/></a:p></p:txBody></p:sp><p:sp><p:nvSpPr><p:cNvPr id="25" name="Text 23"></p:cNvPr><p:cNvSpPr/><p:nvPr></p:nvPr></p:nvSpPr><p:spPr><a:xfrm><a:off x="411480" y="2148840"/><a:ext cx="10972800" cy="274320"/></a:xfrm><a:prstGeom prst="rect"><a:avLst></a:avLst></a:prstGeom><a:noFill/><a:ln></a:ln></p:spPr><p:txBody><a:bodyPr wrap="square" rtlCol="0" anchor="ctr"></a:bodyPr><a:lstStyle/><a:p><a:pPr indent="0" marL="0"><a:buNone/></a:pPr><a:r><a:rPr lang="en-US" sz="1400" i="1" dirty="0"><a:solidFill><a:srgbClr val="4B5563"/></a:solidFill><a:latin typeface="Inter, "Segoe UI", sans-serif" pitchFamily="34" charset="0"/><a:ea typeface="Inter, "Segoe UI", sans-serif" pitchFamily="34" charset="-122"/><a:cs typeface="Inter, "Segoe UI", sans-serif" pitchFamily="34" charset="-120"/></a:rPr><a:t>100 NUMA runs (8-node Opteron) + 56 TILEPro64 mesh configurations</a:t></a:r><a:endParaRPr lang="en-US" sz="1400" dirty="0"/></a:p></p:txBody></p:sp><p:sp><p:nvSpPr><p:cNvPr id="26" name="Shape 24"></p:cNvPr><p:cNvSpPr/><p:nvPr></p:nvPr></p:nvSpPr><p:spPr><a:xfrm><a:off x="411480" y="2606040"/><a:ext cx="6583680" cy="3383280"/></a:xfrm><a:prstGeom prst="roundRect"><a:avLst><a:gd name="adj" fmla="val 2162"/></a:avLst></a:prstGeom><a:solidFill><a:srgbClr val="F4F0EA"/></a:solidFill><a:ln w="31750"><a:solidFill><a:srgbClr val="111827"/></a:solidFill><a:prstDash val="solid"/></a:ln><a:effectLst> <a:outerShdw sx="100000" sy="100000" kx="0" ky="0" algn="bl" rotWithShape="0" blurRad="50800" dist="50800" dir="16200000"> <a:srgbClr val="C8C6BF"> <a:alpha val="75000"/></a:srgbClr> </a:outerShdw></a:effectLst></p:spPr></p:sp><p:sp><p:nvSpPr><p:cNvPr id="27" name="Text 25"></p:cNvPr><p:cNvSpPr/><p:nvPr></p:nvPr></p:nvSpPr><p:spPr><a:xfrm><a:off x="685800" y="2743200"/><a:ext cx="6035040" cy="274320"/></a:xfrm><a:prstGeom prst="rect"><a:avLst></a:avLst></a:prstGeom><a:noFill/><a:ln></a:ln></p:spPr><p:txBody><a:bodyPr wrap="square" rtlCol="0" anchor="ctr"></a:bodyPr><a:lstStyle/><a:p><a:pPr indent="0" marL="0"><a:buNone/></a:pPr><a:r><a:rPr lang="en-US" sz="1500" b="1" dirty="0"><a:solidFill><a:srgbClr val="111827"/></a:solidFill><a:latin typeface="Arial Black, "Trebuchet MS", "Helvetica Neue", sans-serif" pitchFamily="34" charset="0"/><a:ea typeface="Arial Black, "Trebuchet MS", "Helvetica Neue", sans-serif" pitchFamily="34" charset="-122"/><a:cs typeface="Arial Black, "Trebuchet MS", "Helvetica Neue", sans-serif" pitchFamily="34" charset="-120"/></a:rPr><a:t>AMD Opteron Reproduction (100 Runs · 100% Verification)</a:t></a:r><a:endParaRPr lang="en-US" sz="1500" dirty="0"/></a:p></p:txBody></p:sp><p:pic>  <p:nvPicPr><p:cNvPr id="28" name="Image 0" descr="./results/numa/fig7_reproduction.png">    </p:cNvPr>    <p:cNvPicPr><a:picLocks noChangeAspect="1"/></p:cNvPicPr>    <p:nvPr></p:nvPr>  </p:nvPicPr><p:blipFill><a:blip r:embed="rId1"></a:blip>  <a:stretch><a:fillRect/></a:stretch></p:blipFill><p:spPr> <a:xfrm>  <a:off x="685800" y="3063240"/>  <a:ext cx="5852160" cy="2103120"/> </a:xfrm> <a:prstGeom prst="rect"><a:avLst/></a:prstGeom></p:spPr></p:pic><p:sp><p:nvSpPr><p:cNvPr id="29" name="Shape 26"></p:cNvPr><p:cNvSpPr/><p:nvPr></p:nvPr></p:nvSpPr><p:spPr><a:xfrm><a:off x="685800" y="5303520"/><a:ext cx="6035040" cy="548640"/></a:xfrm><a:prstGeom prst="roundRect"><a:avLst><a:gd name="adj" fmla="val 10000"/></a:avLst></a:prstGeom><a:solidFill><a:srgbClr val="EFEAE3"/></a:solidFill><a:ln w="12700"><a:solidFill><a:srgbClr val="111827"/></a:solidFill><a:prstDash val="solid"/></a:ln></p:spPr></p:sp><p:sp><p:nvSpPr><p:cNvPr id="30" name="Text 27"></p:cNvPr><p:cNvSpPr/><p:nvPr></p:nvPr></p:nvSpPr><p:spPr><a:xfrm><a:off x="822960" y="5349240"/><a:ext cx="5760720" cy="457200"/></a:xfrm><a:prstGeom prst="rect"><a:avLst></a:avLst></a:prstGeom><a:noFill/><a:ln></a:ln></p:spPr><p:txBody><a:bodyPr wrap="square" rtlCol="0" anchor="ctr"></a:bodyPr><a:lstStyle/><a:p><a:pPr indent="0" marL="0"><a:buNone/></a:pPr><a:r><a:rPr lang="en-US" sz="1000" dirty="0"><a:solidFill><a:srgbClr val="111827"/></a:solidFill><a:latin typeface=""JetBrains Mono", "Courier New", monospace" pitchFamily="34" charset="0"/><a:ea typeface=""JetBrains Mono", "Courier New", monospace" pitchFamily="34" charset="-122"/><a:cs typeface=""JetBrains Mono", "Courier New", monospace" pitchFamily="34" charset="-120"/></a:rPr><a:t>•  Map: −45.1% Comm (0.55×) · −19.0% Cycles (0.81×)    •  Matmul: −22.5% Comm (0.78×) · Parity    •  SparseLU: −26.7% Comm BUT +15.1% SLOWER!</a:t></a:r><a:endParaRPr lang="en-US" sz="1000" dirty="0"/></a:p></p:txBody></p:sp><p:sp><p:nvSpPr><p:cNvPr id="31" name="Shape 28"></p:cNvPr><p:cNvSpPr/><p:nvPr></p:nvPr></p:nvSpPr><p:spPr><a:xfrm><a:off x="7223760" y="2606040"/><a:ext cx="4572000" cy="1828800"/></a:xfrm><a:prstGeom prst="roundRect"><a:avLst><a:gd name="adj" fmla="val 4000"/></a:avLst></a:prstGeom><a:solidFill><a:srgbClr val="111827"/></a:solidFill><a:ln w="31750"><a:solidFill><a:srgbClr val="111827"/></a:solidFill><a:prstDash val="solid"/></a:ln></p:spPr></p:sp><p:sp><p:nvSpPr><p:cNvPr id="32" name="Text 29"></p:cNvPr><p:cNvSpPr/><p:nvPr></p:nvPr></p:nvSpPr><p:spPr><a:xfrm><a:off x="7452360" y="2743200"/><a:ext cx="4114800" cy="274320"/></a:xfrm><a:prstGeom prst="rect"><a:avLst></a:avLst></a:prstGeom><a:noFill/><a:ln></a:ln></p:spPr><p:txBody><a:bodyPr wrap="square" rtlCol="0" anchor="ctr"></a:bodyPr><a:lstStyle/><a:p><a:pPr indent="0" marL="0"><a:buNone/></a:pPr><a:r><a:rPr lang="en-US" sz="1400" b="1" spc="200" kern="0" dirty="0"><a:solidFill><a:srgbClr val="FFD147"/></a:solidFill><a:latin typeface=""JetBrains Mono", "Courier New", monospace" pitchFamily="34" charset="0"/><a:ea typeface=""JetBrains Mono", "Courier New", monospace" pitchFamily="34" charset="-122"/><a:cs typeface=""JetBrains Mono", "Courier New", monospace" pitchFamily="34" charset="-120"/></a:rPr><a:t>THE PARADOX EXPLAINED</a:t></a:r><a:endParaRPr lang="en-US" sz="1400" dirty="0"/></a:p></p:txBody></p:sp><p:sp><p:nvSpPr><p:cNvPr id="33" name="Text 30"></p:cNvPr><p:cNvSpPr/><p:nvPr></p:nvPr></p:nvSpPr><p:spPr><a:xfrm><a:off x="7452360" y="3063240"/><a:ext cx="4114800" cy="274320"/></a:xfrm><a:prstGeom prst="rect"><a:avLst></a:avLst></a:prstGeom><a:noFill/><a:ln></a:ln></p:spPr><p:txBody><a:bodyPr wrap="square" rtlCol="0" anchor="ctr"></a:bodyPr><a:lstStyle/><a:p><a:pPr indent="0" marL="0"><a:buNone/></a:pPr><a:r><a:rPr lang="en-US" sz="1100" dirty="0"><a:solidFill><a:srgbClr val="F4F0EA"/></a:solidFill><a:latin typeface=""JetBrains Mono", "Courier New", monospace" pitchFamily="34" charset="0"/><a:ea typeface=""JetBrains Mono", "Courier New", monospace" pitchFamily="34" charset="-122"/><a:cs typeface=""JetBrains Mono", "Courier New", monospace" pitchFamily="34" charset="-120"/></a:rPr><a:t>1. Irregular DAG: tasks have skewed input dependencies.</a:t></a:r><a:endParaRPr lang="en-US" sz="1100" dirty="0"/></a:p></p:txBody></p:sp><p:sp><p:nvSpPr><p:cNvPr id="34" name="Text 31"></p:cNvPr><p:cNvSpPr/><p:nvPr></p:nvPr></p:nvSpPr><p:spPr><a:xfrm><a:off x="7452360" y="3355848"/><a:ext cx="4114800" cy="274320"/></a:xfrm><a:prstGeom prst="rect"><a:avLst></a:avLst></a:prstGeom><a:noFill/><a:ln></a:ln></p:spPr><p:txBody><a:bodyPr wrap="square" rtlCol="0" anchor="ctr"></a:bodyPr><a:lstStyle/><a:p><a:pPr indent="0" marL="0"><a:buNone/></a:pPr><a:r><a:rPr lang="en-US" sz="1100" dirty="0"><a:solidFill><a:srgbClr val="F4F0EA"/></a:solidFill><a:latin typeface=""JetBrains Mono", "Courier New", monospace" pitchFamily="34" charset="0"/><a:ea typeface=""JetBrains Mono", "Courier New", monospace" pitchFamily="34" charset="-122"/><a:cs typeface=""JetBrains Mono", "Courier New", monospace" pitchFamily="34" charset="-120"/></a:rPr><a:t>2. Load-blind dealer sends critical tasks to Node 0.</a:t></a:r><a:endParaRPr lang="en-US" sz="1100" dirty="0"/></a:p></p:txBody></p:sp><p:sp><p:nvSpPr><p:cNvPr id="35" name="Text 32"></p:cNvPr><p:cNvSpPr/><p:nvPr></p:nvPr></p:nvSpPr><p:spPr><a:xfrm><a:off x="7452360" y="3648456"/><a:ext cx="4114800" cy="274320"/></a:xfrm><a:prstGeom prst="rect"><a:avLst></a:avLst></a:prstGeom><a:noFill/><a:ln></a:ln></p:spPr><p:txBody><a:bodyPr wrap="square" rtlCol="0" anchor="ctr"></a:bodyPr><a:lstStyle/><a:p><a:pPr indent="0" marL="0"><a:buNone/></a:pPr><a:r><a:rPr lang="en-US" sz="1100" dirty="0"><a:solidFill><a:srgbClr val="F4F0EA"/></a:solidFill><a:latin typeface=""JetBrains Mono", "Courier New", monospace" pitchFamily="34" charset="0"/><a:ea typeface=""JetBrains Mono", "Courier New", monospace" pitchFamily="34" charset="-122"/><a:cs typeface=""JetBrains Mono", "Courier New", monospace" pitchFamily="34" charset="-120"/></a:rPr><a:t>3. Queue 0: 20 tasks  ·  Queues 1–7: EMPTY.</a:t></a:r><a:endParaRPr lang="en-US" sz="1100" dirty="0"/></a:p></p:txBody></p:sp><p:sp><p:nvSpPr><p:cNvPr id="36" name="Text 33"></p:cNvPr><p:cNvSpPr/><p:nvPr></p:nvPr></p:nvSpPr><p:spPr><a:xfrm><a:off x="7452360" y="3941064"/><a:ext cx="4114800" cy="274320"/></a:xfrm><a:prstGeom prst="rect"><a:avLst></a:avLst></a:prstGeom><a:noFill/><a:ln></a:ln></p:spPr><p:txBody><a:bodyPr wrap="square" rtlCol="0" anchor="ctr"></a:bodyPr><a:lstStyle/><a:p><a:pPr indent="0" marL="0"><a:buNone/></a:pPr><a:r><a:rPr lang="en-US" sz="1100" dirty="0"><a:solidFill><a:srgbClr val="F4F0EA"/></a:solidFill><a:latin typeface=""JetBrains Mono", "Courier New", monospace" pitchFamily="34" charset="0"/><a:ea typeface=""JetBrains Mono", "Courier New", monospace" pitchFamily="34" charset="-122"/><a:cs typeface=""JetBrains Mono", "Courier New", monospace" pitchFamily="34" charset="-120"/></a:rPr><a:t>4. 23 cores idle — comm win wiped by starvation.</a:t></a:r><a:endParaRPr lang="en-US" sz="1100" dirty="0"/></a:p></p:txBody></p:sp><p:sp><p:nvSpPr><p:cNvPr id="37" name="Shape 34"></p:cNvPr><p:cNvSpPr/><p:nvPr></p:nvPr></p:nvSpPr><p:spPr><a:xfrm><a:off x="7223760" y="4572000"/><a:ext cx="4572000" cy="1097280"/></a:xfrm><a:prstGeom prst="roundRect"><a:avLst><a:gd name="adj" fmla="val 6667"/></a:avLst></a:prstGeom><a:solidFill><a:srgbClr val="EFEAE3"/></a:solidFill><a:ln w="31750"><a:solidFill><a:srgbClr val="111827"/></a:solidFill><a:prstDash val="solid"/></a:ln></p:spPr></p:sp><p:sp><p:nvSpPr><p:cNvPr id="38" name="Text 35"></p:cNvPr><p:cNvSpPr/><p:nvPr></p:nvPr></p:nvSpPr><p:spPr><a:xfrm><a:off x="7452360" y="4663440"/><a:ext cx="4114800" cy="274320"/></a:xfrm><a:prstGeom prst="rect"><a:avLst></a:avLst></a:prstGeom><a:noFill/><a:ln></a:ln></p:spPr><p:txBody><a:bodyPr wrap="square" rtlCol="0" anchor="ctr"></a:bodyPr><a:lstStyle/><a:p><a:pPr indent="0" marL="0"><a:buNone/></a:pPr><a:r><a:rPr lang="en-US" sz="1600" b="1" dirty="0"><a:solidFill><a:srgbClr val="111827"/></a:solidFill><a:latin typeface="Arial Black, "Trebuchet MS", "Helvetica Neue", sans-serif" pitchFamily="34" charset="0"/><a:ea typeface="Arial Black, "Trebuchet MS", "Helvetica Neue", sans-serif" pitchFamily="34" charset="-122"/><a:cs typeface="Arial Black, "Trebuchet MS", "Helvetica Neue", sans-serif" pitchFamily="34" charset="-120"/></a:rPr><a:t>TILEPro64 8×8 Mesh</a:t></a:r><a:endParaRPr lang="en-US" sz="1600" dirty="0"/></a:p></p:txBody></p:sp><p:sp><p:nvSpPr><p:cNvPr id="39" name="Text 36"></p:cNvPr><p:cNvSpPr/><p:nvPr></p:nvPr></p:nvSpPr><p:spPr><a:xfrm><a:off x="7452360" y="4892040"/><a:ext cx="4114800" cy="457200"/></a:xfrm><a:prstGeom prst="rect"><a:avLst></a:avLst></a:prstGeom><a:noFill/><a:ln></a:ln></p:spPr><p:txBody><a:bodyPr wrap="square" rtlCol="0" anchor="ctr"></a:bodyPr><a:lstStyle/><a:p><a:pPr indent="0" marL="0"><a:lnSpc><a:spcPts val="1200"/></a:lnSpc><a:buNone/></a:pPr><a:r><a:rPr lang="en-US" sz="1000" dirty="0"><a:solidFill><a:srgbClr val="111827"/></a:solidFill><a:latin typeface="Inter, "Segoe UI", sans-serif" pitchFamily="34" charset="0"/><a:ea typeface="Inter, "Segoe UI", sans-serif" pitchFamily="34" charset="-122"/><a:cs typeface="Inter, "Segoe UI", sans-serif" pitchFamily="34" charset="-120"/></a:rPr><a:t>• 80.3% comm reduction (6.67M → 1.31M)  ·  • 39.3% speedup (281K → 170K)  ·  • 0 steals (63 → 0)</a:t></a:r><a:endParaRPr lang="en-US" sz="1000" dirty="0"/></a:p></p:txBody></p:sp><p:pic>  <p:nvPicPr><p:cNvPr id="40" name="Image 1" descr="./tilepro64/results/tilepro64_results.png">    </p:cNvPr>    <p:cNvPicPr><a:picLocks noChangeAspect="1"/></p:cNvPicPr>    <p:nvPr></p:nvPr>  </p:nvPicPr><p:blipFill><a:blip r:embed="rId2"></a:blip>  <a:stretch><a:fillRect/></a:stretch></p:blipFill><p:spPr> <a:xfrm>  <a:off x="7223760" y="5486400"/>  <a:ext cx="4572000" cy="502920"/> </a:xfrm> <a:prstGeom prst="rect"><a:avLst/></a:prstGeom></p:spPr></p:pic><p:pic>  <p:nvPicPr><p:cNvPr id="41" name="Image 2" descr="./tilepro64/results/tilepro64_results.png">    </p:cNvPr>    <p:cNvPicPr><a:picLocks noChangeAspect="1"/></p:cNvPicPr>    <p:nvPr></p:nvPr>  </p:nvPicPr><p:blipFill><a:blip r:embed="rId3"></a:blip>  <a:stretch><a:fillRect/></a:stretch></p:blipFill><p:spPr> <a:xfrm>  <a:off x="7223760" y="5989320"/>  <a:ext cx="4572000" cy="502920"/> </a:xfrm> <a:prstGeom prst="rect"><a:avLst/></a:prstGeom></p:spPr></p:pic><p:sp><p:nvSpPr><p:cNvPr id="42" name="Shape 37"></p:cNvPr><p:cNvSpPr/><p:nvPr></p:nvPr></p:nvSpPr><p:spPr><a:xfrm><a:off x="7223760" y="5623560"/><a:ext cx="4572000" cy="320040"/></a:xfrm><a:prstGeom prst="roundRect"><a:avLst><a:gd name="adj" fmla="val 17143"/></a:avLst></a:prstGeom><a:solidFill><a:srgbClr val="B91C1C"/></a:solidFill><a:ln w="12700"><a:solidFill><a:srgbClr val="111827"/></a:solidFill><a:prstDash val="solid"/></a:ln></p:spPr></p:sp><p:sp><p:nvSpPr><p:cNvPr id="43" name="Text 38"></p:cNvPr><p:cNvSpPr/><p:nvPr></p:nvPr></p:nvSpPr><p:spPr><a:xfrm><a:off x="7315200" y="5641848"/><a:ext cx="4389120" cy="274320"/></a:xfrm><a:prstGeom prst="rect"><a:avLst></a:avLst></a:prstGeom><a:noFill/><a:ln></a:ln></p:spPr><p:txBody><a:bodyPr wrap="square" rtlCol="0" anchor="ctr"></a:bodyPr><a:lstStyle/><a:p><a:pPr algn="ctr" indent="0" marL="0"><a:buNone/></a:pPr><a:r><a:rPr lang="en-US" sz="900" b="1" dirty="0"><a:solidFill><a:srgbClr val="F4F0EA"/></a:solidFill><a:latin typeface=""JetBrains Mono", "Courier New", monospace" pitchFamily="34" charset="0"/><a:ea typeface=""JetBrains Mono", "Courier New", monospace" pitchFamily="34" charset="-122"/><a:cs typeface=""JetBrains Mono", "Courier New", monospace" pitchFamily="34" charset="-120"/></a:rPr><a:t>+15.1% slowdown vs −26.7% comm drop — THE PARADOX</a:t></a:r><a:endParaRPr lang="en-US" sz="900" dirty="0"/></a:p></p:txBody></p:sp><p:sp><p:nvSpPr><p:cNvPr id="44" name="Text 39"></p:cNvPr><p:cNvSpPr/><p:nvPr></p:nvPr></p:nvSpPr><p:spPr><a:xfrm><a:off x="411480" y="6537960"/><a:ext cx="11338560" cy="182880"/></a:xfrm><a:prstGeom prst="rect"><a:avLst></a:avLst></a:prstGeom><a:noFill/><a:ln></a:ln></p:spPr><p:txBody><a:bodyPr wrap="square" rtlCol="0" anchor="ctr"></a:bodyPr><a:lstStyle/><a:p><a:pPr indent="0" marL="0"><a:buNone/></a:pPr><a:r><a:rPr lang="en-US" sz="900" dirty="0"><a:solidFill><a:srgbClr val="6B6B6B"/></a:solidFill><a:latin typeface=""JetBrains Mono", "Courier New", monospace" pitchFamily="34" charset="0"/><a:ea typeface=""JetBrains Mono", "Courier New", monospace" pitchFamily="34" charset="-122"/><a:cs typeface=""JetBrains Mono", "Courier New", monospace" pitchFamily="34" charset="-120"/></a:rPr><a:t>Empirical Reproduction: AMD Opteron NUMA &amp; TILEPro64 Manycore Mesh  ·  04 / 05</a:t></a:r><a:endParaRPr lang="en-US" sz="900" dirty="0"/></a:p></p:txBody></p:sp></p:spTree></p:cSld><p:clrMapOvr><a:masterClrMapping/></p:clrMapOvr></p:sld>
+<p:sld xmlns:a="http://schemas.openxmlformats.org/drawingml/2006/main" xmlns:r="http://schemas.openxmlformats.org/officeDocument/2006/relationships" xmlns:p="http://schemas.openxmlformats.org/presentationml/2006/main"><p:cSld name="Slide 4"><p:spTree><p:nvGrpSpPr><p:cNvPr id="1" name=""/><p:cNvGrpSpPr/><p:nvPr/></p:nvGrpSpPr><p:grpSpPr><a:xfrm><a:off x="0" y="0"/><a:ext cx="0" cy="0"/><a:chOff x="0" y="0"/><a:chExt cx="0" cy="0"/></a:xfrm></p:grpSpPr><p:sp><p:nvSpPr><p:cNvPr id="2" name="Shape 0"></p:cNvPr><p:cNvSpPr/><p:nvPr></p:nvPr></p:nvSpPr><p:spPr><a:xfrm><a:off x="0" y="0"/><a:ext cx="12191695" cy="6858000"/></a:xfrm><a:prstGeom prst="rect"><a:avLst></a:avLst></a:prstGeom><a:solidFill><a:srgbClr val="F4F0EA"/></a:solidFill><a:ln w="12700"><a:solidFill><a:srgbClr val="F4F0EA"/></a:solidFill><a:prstDash val="solid"/></a:ln></p:spPr></p:sp><p:sp><p:nvSpPr><p:cNvPr id="3" name="Shape 1"></p:cNvPr><p:cNvSpPr/><p:nvPr></p:nvPr></p:nvSpPr><p:spPr><a:xfrm><a:off x="960120" y="0"/><a:ext cx="9144" cy="6858000"/></a:xfrm><a:prstGeom prst="rect"><a:avLst></a:avLst></a:prstGeom><a:solidFill><a:srgbClr val="DDD8CF"/></a:solidFill><a:ln w="12700"><a:solidFill><a:srgbClr val="DDD8CF"/></a:solidFill><a:prstDash val="solid"/></a:ln></p:spPr></p:sp><p:sp><p:nvSpPr><p:cNvPr id="4" name="Shape 2"></p:cNvPr><p:cNvSpPr/><p:nvPr></p:nvPr></p:nvSpPr><p:spPr><a:xfrm><a:off x="1920240" y="0"/><a:ext cx="9144" cy="6858000"/></a:xfrm><a:prstGeom prst="rect"><a:avLst></a:avLst></a:prstGeom><a:solidFill><a:srgbClr val="DDD8CF"/></a:solidFill><a:ln w="12700"><a:solidFill><a:srgbClr val="DDD8CF"/></a:solidFill><a:prstDash val="solid"/></a:ln></p:spPr></p:sp><p:sp><p:nvSpPr><p:cNvPr id="5" name="Shape 3"></p:cNvPr><p:cNvSpPr/><p:nvPr></p:nvPr></p:nvSpPr><p:spPr><a:xfrm><a:off x="2880360" y="0"/><a:ext cx="9144" cy="6858000"/></a:xfrm><a:prstGeom prst="rect"><a:avLst></a:avLst></a:prstGeom><a:solidFill><a:srgbClr val="DDD8CF"/></a:solidFill><a:ln w="12700"><a:solidFill><a:srgbClr val="DDD8CF"/></a:solidFill><a:prstDash val="solid"/></a:ln></p:spPr></p:sp><p:sp><p:nvSpPr><p:cNvPr id="6" name="Shape 4"></p:cNvPr><p:cNvSpPr/><p:nvPr></p:nvPr></p:nvSpPr><p:spPr><a:xfrm><a:off x="3840480" y="0"/><a:ext cx="9144" cy="6858000"/></a:xfrm><a:prstGeom prst="rect"><a:avLst></a:avLst></a:prstGeom><a:solidFill><a:srgbClr val="DDD8CF"/></a:solidFill><a:ln w="12700"><a:solidFill><a:srgbClr val="DDD8CF"/></a:solidFill><a:prstDash val="solid"/></a:ln></p:spPr></p:sp><p:sp><p:nvSpPr><p:cNvPr id="7" name="Shape 5"></p:cNvPr><p:cNvSpPr/><p:nvPr></p:nvPr></p:nvSpPr><p:spPr><a:xfrm><a:off x="4800600" y="0"/><a:ext cx="9144" cy="6858000"/></a:xfrm><a:prstGeom prst="rect"><a:avLst></a:avLst></a:prstGeom><a:solidFill><a:srgbClr val="DDD8CF"/></a:solidFill><a:ln w="12700"><a:solidFill><a:srgbClr val="DDD8CF"/></a:solidFill><a:prstDash val="solid"/></a:ln></p:spPr></p:sp><p:sp><p:nvSpPr><p:cNvPr id="8" name="Shape 6"></p:cNvPr><p:cNvSpPr/><p:nvPr></p:nvPr></p:nvSpPr><p:spPr><a:xfrm><a:off x="5760720" y="0"/><a:ext cx="9144" cy="6858000"/></a:xfrm><a:prstGeom prst="rect"><a:avLst></a:avLst></a:prstGeom><a:solidFill><a:srgbClr val="DDD8CF"/></a:solidFill><a:ln w="12700"><a:solidFill><a:srgbClr val="DDD8CF"/></a:solidFill><a:prstDash val="solid"/></a:ln></p:spPr></p:sp><p:sp><p:nvSpPr><p:cNvPr id="9" name="Shape 7"></p:cNvPr><p:cNvSpPr/><p:nvPr></p:nvPr></p:nvSpPr><p:spPr><a:xfrm><a:off x="6720840" y="0"/><a:ext cx="9144" cy="6858000"/></a:xfrm><a:prstGeom prst="rect"><a:avLst></a:avLst></a:prstGeom><a:solidFill><a:srgbClr val="DDD8CF"/></a:solidFill><a:ln w="12700"><a:solidFill><a:srgbClr val="DDD8CF"/></a:solidFill><a:prstDash val="solid"/></a:ln></p:spPr></p:sp><p:sp><p:nvSpPr><p:cNvPr id="10" name="Shape 8"></p:cNvPr><p:cNvSpPr/><p:nvPr></p:nvPr></p:nvSpPr><p:spPr><a:xfrm><a:off x="7680960" y="0"/><a:ext cx="9144" cy="6858000"/></a:xfrm><a:prstGeom prst="rect"><a:avLst></a:avLst></a:prstGeom><a:solidFill><a:srgbClr val="DDD8CF"/></a:solidFill><a:ln w="12700"><a:solidFill><a:srgbClr val="DDD8CF"/></a:solidFill><a:prstDash val="solid"/></a:ln></p:spPr></p:sp><p:sp><p:nvSpPr><p:cNvPr id="11" name="Shape 9"></p:cNvPr><p:cNvSpPr/><p:nvPr></p:nvPr></p:nvSpPr><p:spPr><a:xfrm><a:off x="8641080" y="0"/><a:ext cx="9144" cy="6858000"/></a:xfrm><a:prstGeom prst="rect"><a:avLst></a:avLst></a:prstGeom><a:solidFill><a:srgbClr val="DDD8CF"/></a:solidFill><a:ln w="12700"><a:solidFill><a:srgbClr val="DDD8CF"/></a:solidFill><a:prstDash val="solid"/></a:ln></p:spPr></p:sp><p:sp><p:nvSpPr><p:cNvPr id="12" name="Shape 10"></p:cNvPr><p:cNvSpPr/><p:nvPr></p:nvPr></p:nvSpPr><p:spPr><a:xfrm><a:off x="9601200" y="0"/><a:ext cx="9144" cy="6858000"/></a:xfrm><a:prstGeom prst="rect"><a:avLst></a:avLst></a:prstGeom><a:solidFill><a:srgbClr val="DDD8CF"/></a:solidFill><a:ln w="12700"><a:solidFill><a:srgbClr val="DDD8CF"/></a:solidFill><a:prstDash val="solid"/></a:ln></p:spPr></p:sp><p:sp><p:nvSpPr><p:cNvPr id="13" name="Shape 11"></p:cNvPr><p:cNvSpPr/><p:nvPr></p:nvPr></p:nvSpPr><p:spPr><a:xfrm><a:off x="10561320" y="0"/><a:ext cx="9144" cy="6858000"/></a:xfrm><a:prstGeom prst="rect"><a:avLst></a:avLst></a:prstGeom><a:solidFill><a:srgbClr val="DDD8CF"/></a:solidFill><a:ln w="12700"><a:solidFill><a:srgbClr val="DDD8CF"/></a:solidFill><a:prstDash val="solid"/></a:ln></p:spPr></p:sp><p:sp><p:nvSpPr><p:cNvPr id="14" name="Shape 12"></p:cNvPr><p:cNvSpPr/><p:nvPr></p:nvPr></p:nvSpPr><p:spPr><a:xfrm><a:off x="0" y="960120"/><a:ext cx="12191695" cy="9144"/></a:xfrm><a:prstGeom prst="rect"><a:avLst></a:avLst></a:prstGeom><a:solidFill><a:srgbClr val="DDD8CF"/></a:solidFill><a:ln w="12700"><a:solidFill><a:srgbClr val="DDD8CF"/></a:solidFill><a:prstDash val="solid"/></a:ln></p:spPr></p:sp><p:sp><p:nvSpPr><p:cNvPr id="15" name="Shape 13"></p:cNvPr><p:cNvSpPr/><p:nvPr></p:nvPr></p:nvSpPr><p:spPr><a:xfrm><a:off x="0" y="1920240"/><a:ext cx="12191695" cy="9144"/></a:xfrm><a:prstGeom prst="rect"><a:avLst></a:avLst></a:prstGeom><a:solidFill><a:srgbClr val="DDD8CF"/></a:solidFill><a:ln w="12700"><a:solidFill><a:srgbClr val="DDD8CF"/></a:solidFill><a:prstDash val="solid"/></a:ln></p:spPr></p:sp><p:sp><p:nvSpPr><p:cNvPr id="16" name="Shape 14"></p:cNvPr><p:cNvSpPr/><p:nvPr></p:nvPr></p:nvSpPr><p:spPr><a:xfrm><a:off x="0" y="2880360"/><a:ext cx="12191695" cy="9144"/></a:xfrm><a:prstGeom prst="rect"><a:avLst></a:avLst></a:prstGeom><a:solidFill><a:srgbClr val="DDD8CF"/></a:solidFill><a:ln w="12700"><a:solidFill><a:srgbClr val="DDD8CF"/></a:solidFill><a:prstDash val="solid"/></a:ln></p:spPr></p:sp><p:sp><p:nvSpPr><p:cNvPr id="17" name="Shape 15"></p:cNvPr><p:cNvSpPr/><p:nvPr></p:nvPr></p:nvSpPr><p:spPr><a:xfrm><a:off x="0" y="3840480"/><a:ext cx="12191695" cy="9144"/></a:xfrm><a:prstGeom prst="rect"><a:avLst></a:avLst></a:prstGeom><a:solidFill><a:srgbClr val="DDD8CF"/></a:solidFill><a:ln w="12700"><a:solidFill><a:srgbClr val="DDD8CF"/></a:solidFill><a:prstDash val="solid"/></a:ln></p:spPr></p:sp><p:sp><p:nvSpPr><p:cNvPr id="18" name="Shape 16"></p:cNvPr><p:cNvSpPr/><p:nvPr></p:nvPr></p:nvSpPr><p:spPr><a:xfrm><a:off x="0" y="4800600"/><a:ext cx="12191695" cy="9144"/></a:xfrm><a:prstGeom prst="rect"><a:avLst></a:avLst></a:prstGeom><a:solidFill><a:srgbClr val="DDD8CF"/></a:solidFill><a:ln w="12700"><a:solidFill><a:srgbClr val="DDD8CF"/></a:solidFill><a:prstDash val="solid"/></a:ln></p:spPr></p:sp><p:sp><p:nvSpPr><p:cNvPr id="19" name="Shape 17"></p:cNvPr><p:cNvSpPr/><p:nvPr></p:nvPr></p:nvSpPr><p:spPr><a:xfrm><a:off x="0" y="5760720"/><a:ext cx="12191695" cy="9144"/></a:xfrm><a:prstGeom prst="rect"><a:avLst></a:avLst></a:prstGeom><a:solidFill><a:srgbClr val="DDD8CF"/></a:solidFill><a:ln w="12700"><a:solidFill><a:srgbClr val="DDD8CF"/></a:solidFill><a:prstDash val="solid"/></a:ln></p:spPr></p:sp><p:sp><p:nvSpPr><p:cNvPr id="20" name="Shape 18"></p:cNvPr><p:cNvSpPr/><p:nvPr></p:nvPr></p:nvSpPr><p:spPr><a:xfrm><a:off x="411480" y="320040"/><a:ext cx="2377440" cy="292608"/></a:xfrm><a:prstGeom prst="roundRect"><a:avLst><a:gd name="adj" fmla="val 50000"/></a:avLst></a:prstGeom><a:solidFill><a:srgbClr val="111827"/></a:solidFill><a:ln w="12700"><a:solidFill><a:srgbClr val="111827"/></a:solidFill><a:prstDash val="solid"/></a:ln></p:spPr></p:sp><p:sp><p:nvSpPr><p:cNvPr id="21" name="Text 19"></p:cNvPr><p:cNvSpPr/><p:nvPr></p:nvPr></p:nvSpPr><p:spPr><a:xfrm><a:off x="502920" y="320040"/><a:ext cx="2194560" cy="292608"/></a:xfrm><a:prstGeom prst="rect"><a:avLst></a:avLst></a:prstGeom><a:noFill/><a:ln></a:ln></p:spPr><p:txBody><a:bodyPr wrap="square" rtlCol="0" anchor="ctr"></a:bodyPr><a:lstStyle/><a:p><a:pPr indent="0" marL="0"><a:buNone/></a:pPr><a:r><a:rPr lang="en-US" sz="900" b="1" spc="200" kern="0" dirty="0"><a:solidFill><a:srgbClr val="FFD147"/></a:solidFill><a:latin typeface=""JetBrains Mono", "Courier New", monospace" pitchFamily="34" charset="0"/><a:ea typeface=""JetBrains Mono", "Courier New", monospace" pitchFamily="34" charset="-122"/><a:cs typeface=""JetBrains Mono", "Courier New", monospace" pitchFamily="34" charset="-120"/></a:rPr><a:t>PART 03</a:t></a:r><a:endParaRPr lang="en-US" sz="900" dirty="0"/></a:p></p:txBody></p:sp><p:sp><p:nvSpPr><p:cNvPr id="22" name="Text 20"></p:cNvPr><p:cNvSpPr/><p:nvPr></p:nvPr></p:nvSpPr><p:spPr><a:xfrm><a:off x="411480" y="777240"/><a:ext cx="10972800" cy="731520"/></a:xfrm><a:prstGeom prst="rect"><a:avLst></a:avLst></a:prstGeom><a:noFill/><a:ln></a:ln></p:spPr><p:txBody><a:bodyPr wrap="square" rtlCol="0" anchor="ctr"></a:bodyPr><a:lstStyle/><a:p><a:pPr indent="0" marL="0"><a:buNone/></a:pPr><a:r><a:rPr lang="en-US" sz="4200" b="1" spc="-300" kern="0" dirty="0"><a:solidFill><a:srgbClr val="111827"/></a:solidFill><a:latin typeface="Arial Black, "Trebuchet MS", "Helvetica Neue", sans-serif" pitchFamily="34" charset="0"/><a:ea typeface="Arial Black, "Trebuchet MS", "Helvetica Neue", sans-serif" pitchFamily="34" charset="-122"/><a:cs typeface="Arial Black, "Trebuchet MS", "Helvetica Neue", sans-serif" pitchFamily="34" charset="-120"/></a:rPr><a:t>The SparseLU Paradox:</a:t></a:r><a:endParaRPr lang="en-US" sz="4200" dirty="0"/></a:p></p:txBody></p:sp><p:sp><p:nvSpPr><p:cNvPr id="23" name="Shape 21"></p:cNvPr><p:cNvSpPr/><p:nvPr></p:nvPr></p:nvSpPr><p:spPr><a:xfrm><a:off x="5943600" y="1417320"/><a:ext cx="5852160" cy="640080"/></a:xfrm><a:prstGeom prst="roundRect"><a:avLst><a:gd name="adj" fmla="val 11429"/></a:avLst></a:prstGeom><a:solidFill><a:srgbClr val="FFD147"/></a:solidFill><a:ln w="31750"><a:solidFill><a:srgbClr val="111827"/></a:solidFill><a:prstDash val="solid"/></a:ln></p:spPr></p:sp><p:sp><p:nvSpPr><p:cNvPr id="24" name="Text 22"></p:cNvPr><p:cNvSpPr/><p:nvPr></p:nvPr></p:nvSpPr><p:spPr><a:xfrm><a:off x="6035040" y="1463040"/><a:ext cx="5669280" cy="548640"/></a:xfrm><a:prstGeom prst="rect"><a:avLst></a:avLst></a:prstGeom><a:noFill/><a:ln></a:ln></p:spPr><p:txBody><a:bodyPr wrap="square" rtlCol="0" anchor="ctr"></a:bodyPr><a:lstStyle/><a:p><a:pPr indent="0" marL="0"><a:buNone/></a:pPr><a:r><a:rPr lang="en-US" sz="3000" b="1" spc="-200" kern="0" dirty="0"><a:solidFill><a:srgbClr val="111827"/></a:solidFill><a:latin typeface="Arial Black, "Trebuchet MS", "Helvetica Neue", sans-serif" pitchFamily="34" charset="0"/><a:ea typeface="Arial Black, "Trebuchet MS", "Helvetica Neue", sans-serif" pitchFamily="34" charset="-122"/><a:cs typeface="Arial Black, "Trebuchet MS", "Helvetica Neue", sans-serif" pitchFamily="34" charset="-120"/></a:rPr><a:t>When Locality Slows Down</a:t></a:r><a:endParaRPr lang="en-US" sz="3000" dirty="0"/></a:p></p:txBody></p:sp><p:sp><p:nvSpPr><p:cNvPr id="25" name="Text 23"></p:cNvPr><p:cNvSpPr/><p:nvPr></p:nvPr></p:nvSpPr><p:spPr><a:xfrm><a:off x="411480" y="2148840"/><a:ext cx="10972800" cy="274320"/></a:xfrm><a:prstGeom prst="rect"><a:avLst></a:avLst></a:prstGeom><a:noFill/><a:ln></a:ln></p:spPr><p:txBody><a:bodyPr wrap="square" rtlCol="0" anchor="ctr"></a:bodyPr><a:lstStyle/><a:p><a:pPr indent="0" marL="0"><a:buNone/></a:pPr><a:r><a:rPr lang="en-US" sz="1400" i="1" dirty="0"><a:solidFill><a:srgbClr val="4B5563"/></a:solidFill><a:latin typeface="Inter, "Segoe UI", sans-serif" pitchFamily="34" charset="0"/><a:ea typeface="Inter, "Segoe UI", sans-serif" pitchFamily="34" charset="-122"/><a:cs typeface="Inter, "Segoe UI", sans-serif" pitchFamily="34" charset="-120"/></a:rPr><a:t>100 NUMA runs (8-node Opteron) + 56 TILEPro64 mesh configurations</a:t></a:r><a:endParaRPr lang="en-US" sz="1400" dirty="0"/></a:p></p:txBody></p:sp><p:sp><p:nvSpPr><p:cNvPr id="26" name="Shape 24"></p:cNvPr><p:cNvSpPr/><p:nvPr></p:nvPr></p:nvSpPr><p:spPr><a:xfrm><a:off x="411480" y="2468880"/><a:ext cx="5440680" cy="3520440"/></a:xfrm><a:prstGeom prst="roundRect"><a:avLst><a:gd name="adj" fmla="val 2078"/></a:avLst></a:prstGeom><a:solidFill><a:srgbClr val="F4F0EA"/></a:solidFill><a:ln w="31750"><a:solidFill><a:srgbClr val="111827"/></a:solidFill><a:prstDash val="solid"/></a:ln><a:effectLst> <a:outerShdw sx="100000" sy="100000" kx="0" ky="0" algn="bl" rotWithShape="0" blurRad="50800" dist="50800" dir="16200000"> <a:srgbClr val="C8C6BF"> <a:alpha val="75000"/></a:srgbClr> </a:outerShdw></a:effectLst></p:spPr></p:sp><p:sp><p:nvSpPr><p:cNvPr id="27" name="Text 25"></p:cNvPr><p:cNvSpPr/><p:nvPr></p:nvPr></p:nvSpPr><p:spPr><a:xfrm><a:off x="594360" y="2606040"/><a:ext cx="5074920" cy="320040"/></a:xfrm><a:prstGeom prst="rect"><a:avLst></a:avLst></a:prstGeom><a:noFill/><a:ln></a:ln></p:spPr><p:txBody><a:bodyPr wrap="square" rtlCol="0" anchor="ctr"></a:bodyPr><a:lstStyle/><a:p><a:pPr indent="0" marL="0"><a:buNone/></a:pPr><a:r><a:rPr lang="en-US" sz="1600" b="1" dirty="0"><a:solidFill><a:srgbClr val="111827"/></a:solidFill><a:latin typeface="Arial Black, "Trebuchet MS", "Helvetica Neue", sans-serif" pitchFamily="34" charset="0"/><a:ea typeface="Arial Black, "Trebuchet MS", "Helvetica Neue", sans-serif" pitchFamily="34" charset="-122"/><a:cs typeface="Arial Black, "Trebuchet MS", "Helvetica Neue", sans-serif" pitchFamily="34" charset="-120"/></a:rPr><a:t>1. AMD Opteron NUMA Reproduction (100 Runs)</a:t></a:r><a:endParaRPr lang="en-US" sz="1600" dirty="0"/></a:p></p:txBody></p:sp><p:pic>  <p:nvPicPr><p:cNvPr id="28" name="Image 0" descr="./results/numa/fig7_reproduction.png">    </p:cNvPr>    <p:cNvPicPr><a:picLocks noChangeAspect="1"/></p:cNvPicPr>    <p:nvPr></p:nvPr>  </p:nvPicPr><p:blipFill><a:blip r:embed="rId1"></a:blip>  <a:stretch><a:fillRect/></a:stretch></p:blipFill><p:spPr> <a:xfrm>  <a:off x="594360" y="2971800"/>  <a:ext cx="5074920" cy="2240280"/> </a:xfrm> <a:prstGeom prst="rect"><a:avLst/></a:prstGeom></p:spPr></p:pic><p:sp><p:nvSpPr><p:cNvPr id="29" name="Shape 26"></p:cNvPr><p:cNvSpPr/><p:nvPr></p:nvPr></p:nvSpPr><p:spPr><a:xfrm><a:off x="594360" y="5349240"/><a:ext cx="5074920" cy="502920"/></a:xfrm><a:prstGeom prst="roundRect"><a:avLst><a:gd name="adj" fmla="val 10909"/></a:avLst></a:prstGeom><a:solidFill><a:srgbClr val="EFEAE3"/></a:solidFill><a:ln w="15240"><a:solidFill><a:srgbClr val="111827"/></a:solidFill><a:prstDash val="solid"/></a:ln></p:spPr></p:sp><p:sp><p:nvSpPr><p:cNvPr id="30" name="Text 27"></p:cNvPr><p:cNvSpPr/><p:nvPr></p:nvPr></p:nvSpPr><p:spPr><a:xfrm><a:off x="685800" y="5376672"/><a:ext cx="4892040" cy="438912"/></a:xfrm><a:prstGeom prst="rect"><a:avLst></a:avLst></a:prstGeom><a:noFill/><a:ln></a:ln></p:spPr><p:txBody><a:bodyPr wrap="square" rtlCol="0" anchor="ctr"></a:bodyPr><a:lstStyle/><a:p><a:pPr indent="0" marL="0"><a:buNone/></a:pPr><a:r><a:rPr lang="en-US" sz="1000" b="1" dirty="0"><a:solidFill><a:srgbClr val="111827"/></a:solidFill><a:latin typeface=""JetBrains Mono", "Courier New", monospace" pitchFamily="34" charset="0"/><a:ea typeface=""JetBrains Mono", "Courier New", monospace" pitchFamily="34" charset="-122"/><a:cs typeface=""JetBrains Mono", "Courier New", monospace" pitchFamily="34" charset="-120"/></a:rPr><a:t>• Map: −45.1% Comm · −19.0% Cycles    • SparseLU: +15.1% SLOWER (Paradox!)</a:t></a:r><a:endParaRPr lang="en-US" sz="1000" dirty="0"/></a:p></p:txBody></p:sp><p:sp><p:nvSpPr><p:cNvPr id="31" name="Shape 28"></p:cNvPr><p:cNvSpPr/><p:nvPr></p:nvPr></p:nvSpPr><p:spPr><a:xfrm><a:off x="6263640" y="2468880"/><a:ext cx="5440680" cy="3520440"/></a:xfrm><a:prstGeom prst="roundRect"><a:avLst><a:gd name="adj" fmla="val 2078"/></a:avLst></a:prstGeom><a:solidFill><a:srgbClr val="F4F0EA"/></a:solidFill><a:ln w="31750"><a:solidFill><a:srgbClr val="111827"/></a:solidFill><a:prstDash val="solid"/></a:ln><a:effectLst> <a:outerShdw sx="100000" sy="100000" kx="0" ky="0" algn="bl" rotWithShape="0" blurRad="50800" dist="50800" dir="16200000"> <a:srgbClr val="C8C6BF"> <a:alpha val="75000"/></a:srgbClr> </a:outerShdw></a:effectLst></p:spPr></p:sp><p:sp><p:nvSpPr><p:cNvPr id="32" name="Text 29"></p:cNvPr><p:cNvSpPr/><p:nvPr></p:nvPr></p:nvSpPr><p:spPr><a:xfrm><a:off x="6446520" y="2606040"/><a:ext cx="5074920" cy="320040"/></a:xfrm><a:prstGeom prst="rect"><a:avLst></a:avLst></a:prstGeom><a:noFill/><a:ln></a:ln></p:spPr><p:txBody><a:bodyPr wrap="square" rtlCol="0" anchor="ctr"></a:bodyPr><a:lstStyle/><a:p><a:pPr indent="0" marL="0"><a:buNone/></a:pPr><a:r><a:rPr lang="en-US" sz="1600" b="1" dirty="0"><a:solidFill><a:srgbClr val="111827"/></a:solidFill><a:latin typeface="Arial Black, "Trebuchet MS", "Helvetica Neue", sans-serif" pitchFamily="34" charset="0"/><a:ea typeface="Arial Black, "Trebuchet MS", "Helvetica Neue", sans-serif" pitchFamily="34" charset="-122"/><a:cs typeface="Arial Black, "Trebuchet MS", "Helvetica Neue", sans-serif" pitchFamily="34" charset="-120"/></a:rPr><a:t>2. TILEPro64 8×8 Mesh Simulation (64 Cores)</a:t></a:r><a:endParaRPr lang="en-US" sz="1600" dirty="0"/></a:p></p:txBody></p:sp><p:pic>  <p:nvPicPr><p:cNvPr id="33" name="Image 1" descr="./tilepro64/results/tilepro64_results.png">    </p:cNvPr>    <p:cNvPicPr><a:picLocks noChangeAspect="1"/></p:cNvPicPr>    <p:nvPr></p:nvPr>  </p:nvPicPr><p:blipFill><a:blip r:embed="rId2"></a:blip>  <a:stretch><a:fillRect/></a:stretch></p:blipFill><p:spPr> <a:xfrm>  <a:off x="6446520" y="2971800"/>  <a:ext cx="5074920" cy="2240280"/> </a:xfrm> <a:prstGeom prst="rect"><a:avLst/></a:prstGeom></p:spPr></p:pic><p:sp><p:nvSpPr><p:cNvPr id="34" name="Shape 30"></p:cNvPr><p:cNvSpPr/><p:nvPr></p:nvPr></p:nvSpPr><p:spPr><a:xfrm><a:off x="6446520" y="5349240"/><a:ext cx="5074920" cy="502920"/></a:xfrm><a:prstGeom prst="roundRect"><a:avLst><a:gd name="adj" fmla="val 10909"/></a:avLst></a:prstGeom><a:solidFill><a:srgbClr val="EFEAE3"/></a:solidFill><a:ln w="15240"><a:solidFill><a:srgbClr val="111827"/></a:solidFill><a:prstDash val="solid"/></a:ln></p:spPr></p:sp><p:sp><p:nvSpPr><p:cNvPr id="35" name="Text 31"></p:cNvPr><p:cNvSpPr/><p:nvPr></p:nvPr></p:nvSpPr><p:spPr><a:xfrm><a:off x="6537960" y="5376672"/><a:ext cx="4892040" cy="438912"/></a:xfrm><a:prstGeom prst="rect"><a:avLst></a:avLst></a:prstGeom><a:noFill/><a:ln></a:ln></p:spPr><p:txBody><a:bodyPr wrap="square" rtlCol="0" anchor="ctr"></a:bodyPr><a:lstStyle/><a:p><a:pPr indent="0" marL="0"><a:buNone/></a:pPr><a:r><a:rPr lang="en-US" sz="1000" b="1" dirty="0"><a:solidFill><a:srgbClr val="111827"/></a:solidFill><a:latin typeface=""JetBrains Mono", "Courier New", monospace" pitchFamily="34" charset="0"/><a:ea typeface=""JetBrains Mono", "Courier New", monospace" pitchFamily="34" charset="-122"/><a:cs typeface=""JetBrains Mono", "Courier New", monospace" pitchFamily="34" charset="-120"/></a:rPr><a:t>• Map: −80.3% Comm Drop · 39.3% Speedup · 0 Steals vs 63 in WS baseline</a:t></a:r><a:endParaRPr lang="en-US" sz="1000" dirty="0"/></a:p></p:txBody></p:sp><p:sp><p:nvSpPr><p:cNvPr id="36" name="Shape 32"></p:cNvPr><p:cNvSpPr/><p:nvPr></p:nvPr></p:nvSpPr><p:spPr><a:xfrm><a:off x="411480" y="6080760"/><a:ext cx="11292840" cy="411480"/></a:xfrm><a:prstGeom prst="roundRect"><a:avLst><a:gd name="adj" fmla="val 13333"/></a:avLst></a:prstGeom><a:solidFill><a:srgbClr val="FFD147"/></a:solidFill><a:ln w="25400"><a:solidFill><a:srgbClr val="111827"/></a:solidFill><a:prstDash val="solid"/></a:ln></p:spPr></p:sp><p:sp><p:nvSpPr><p:cNvPr id="37" name="Text 33"></p:cNvPr><p:cNvSpPr/><p:nvPr></p:nvPr></p:nvSpPr><p:spPr><a:xfrm><a:off x="594360" y="6080760"/><a:ext cx="10927080" cy="411480"/></a:xfrm><a:prstGeom prst="rect"><a:avLst></a:avLst></a:prstGeom><a:noFill/><a:ln></a:ln></p:spPr><p:txBody><a:bodyPr wrap="square" rtlCol="0" anchor="ctr"></a:bodyPr><a:lstStyle/><a:p><a:pPr algn="ctr" indent="0" marL="0"><a:buNone/></a:pPr><a:r><a:rPr lang="en-US" sz="1150" b="1" dirty="0"><a:solidFill><a:srgbClr val="111827"/></a:solidFill><a:latin typeface="Inter, "Segoe UI", sans-serif" pitchFamily="34" charset="0"/><a:ea typeface="Inter, "Segoe UI", sans-serif" pitchFamily="34" charset="-122"/><a:cs typeface="Inter, "Segoe UI", sans-serif" pitchFamily="34" charset="-120"/></a:rPr><a:t>THE EMPIRICAL LAW: Locality dealing cuts comm cost by up to 80.3%, but causes a +15.1% slowdown on irregular DAGs without load balancing.</a:t></a:r><a:endParaRPr lang="en-US" sz="1150" dirty="0"/></a:p></p:txBody></p:sp><p:sp><p:nvSpPr><p:cNvPr id="38" name="Text 34"></p:cNvPr><p:cNvSpPr/><p:nvPr></p:nvPr></p:nvSpPr><p:spPr><a:xfrm><a:off x="411480" y="6537960"/><a:ext cx="11338560" cy="182880"/></a:xfrm><a:prstGeom prst="rect"><a:avLst></a:avLst></a:prstGeom><a:noFill/><a:ln></a:ln></p:spPr><p:txBody><a:bodyPr wrap="square" rtlCol="0" anchor="ctr"></a:bodyPr><a:lstStyle/><a:p><a:pPr indent="0" marL="0"><a:buNone/></a:pPr><a:r><a:rPr lang="en-US" sz="900" dirty="0"><a:solidFill><a:srgbClr val="6B6B6B"/></a:solidFill><a:latin typeface=""JetBrains Mono", "Courier New", monospace" pitchFamily="34" charset="0"/><a:ea typeface=""JetBrains Mono", "Courier New", monospace" pitchFamily="34" charset="-122"/><a:cs typeface=""JetBrains Mono", "Courier New", monospace" pitchFamily="34" charset="-120"/></a:rPr><a:t>Empirical Reproduction: AMD Opteron NUMA &amp; TILEPro64 Manycore Mesh  ·  04 / 05</a:t></a:r><a:endParaRPr lang="en-US" sz="900" dirty="0"/></a:p></p:txBody></p:sp></p:spTree></p:cSld><p:clrMapOvr><a:masterClrMapping/></p:clrMapOvr></p:sld>
 </file>
 
 <file path=ppt/slides/slide5.xml><?xml version="1.0" encoding="UTF-8" standalone="yes"?>
